--- a/wiki任务/组会9.15.pptx
+++ b/wiki任务/组会9.15.pptx
@@ -5,13 +5,13 @@
     <p:sldMasterId id="2147483648" r:id="rId1"/>
   </p:sldMasterIdLst>
   <p:sldIdLst>
-    <p:sldId id="256" r:id="rId2"/>
-    <p:sldId id="257" r:id="rId3"/>
-    <p:sldId id="258" r:id="rId4"/>
-    <p:sldId id="259" r:id="rId5"/>
-    <p:sldId id="260" r:id="rId6"/>
-    <p:sldId id="261" r:id="rId7"/>
-    <p:sldId id="262" r:id="rId8"/>
+    <p:sldId id="256" r:id="rId3"/>
+    <p:sldId id="257" r:id="rId4"/>
+    <p:sldId id="258" r:id="rId5"/>
+    <p:sldId id="259" r:id="rId6"/>
+    <p:sldId id="260" r:id="rId7"/>
+    <p:sldId id="261" r:id="rId8"/>
+    <p:sldId id="262" r:id="rId9"/>
   </p:sldIdLst>
   <p:sldSz cx="12192000" cy="6858000"/>
   <p:notesSz cx="6858000" cy="9144000"/>
@@ -174,6 +174,7 @@
               <a:rPr lang="zh-CN" altLang="en-US"/>
               <a:t>单击此处编辑母版标题样式</a:t>
             </a:r>
+            <a:endParaRPr lang="zh-CN" altLang="en-US"/>
           </a:p>
         </p:txBody>
       </p:sp>
@@ -238,6 +239,7 @@
               <a:rPr lang="zh-CN" altLang="en-US"/>
               <a:t>单击此处编辑母版副标题样式</a:t>
             </a:r>
+            <a:endParaRPr lang="zh-CN" altLang="en-US"/>
           </a:p>
         </p:txBody>
       </p:sp>
@@ -258,7 +260,6 @@
           <a:p>
             <a:fld id="{D997B5FA-0921-464F-AAE1-844C04324D75}" type="datetimeFigureOut">
               <a:rPr lang="zh-CN" altLang="en-US" smtClean="0"/>
-              <a:t>2026/9/15</a:t>
             </a:fld>
             <a:endParaRPr lang="zh-CN" altLang="en-US"/>
           </a:p>
@@ -300,7 +301,6 @@
           <a:p>
             <a:fld id="{565CE74E-AB26-4998-AD42-012C4C1AD076}" type="slidenum">
               <a:rPr lang="zh-CN" altLang="en-US" smtClean="0"/>
-              <a:t>‹#›</a:t>
             </a:fld>
             <a:endParaRPr lang="zh-CN" altLang="en-US"/>
           </a:p>
@@ -350,6 +350,7 @@
               <a:rPr lang="zh-CN" altLang="en-US"/>
               <a:t>单击此处编辑母版标题样式</a:t>
             </a:r>
+            <a:endParaRPr lang="zh-CN" altLang="en-US"/>
           </a:p>
         </p:txBody>
       </p:sp>
@@ -373,6 +374,7 @@
               <a:rPr lang="zh-CN" altLang="en-US"/>
               <a:t>单击此处编辑母版文本样式</a:t>
             </a:r>
+            <a:endParaRPr lang="zh-CN" altLang="en-US"/>
           </a:p>
           <a:p>
             <a:pPr lvl="1"/>
@@ -380,6 +382,7 @@
               <a:rPr lang="zh-CN" altLang="en-US"/>
               <a:t>第二级</a:t>
             </a:r>
+            <a:endParaRPr lang="zh-CN" altLang="en-US"/>
           </a:p>
           <a:p>
             <a:pPr lvl="2"/>
@@ -387,6 +390,7 @@
               <a:rPr lang="zh-CN" altLang="en-US"/>
               <a:t>第三级</a:t>
             </a:r>
+            <a:endParaRPr lang="zh-CN" altLang="en-US"/>
           </a:p>
           <a:p>
             <a:pPr lvl="3"/>
@@ -394,6 +398,7 @@
               <a:rPr lang="zh-CN" altLang="en-US"/>
               <a:t>第四级</a:t>
             </a:r>
+            <a:endParaRPr lang="zh-CN" altLang="en-US"/>
           </a:p>
           <a:p>
             <a:pPr lvl="4"/>
@@ -401,6 +406,7 @@
               <a:rPr lang="zh-CN" altLang="en-US"/>
               <a:t>第五级</a:t>
             </a:r>
+            <a:endParaRPr lang="zh-CN" altLang="en-US"/>
           </a:p>
         </p:txBody>
       </p:sp>
@@ -421,7 +427,6 @@
           <a:p>
             <a:fld id="{D997B5FA-0921-464F-AAE1-844C04324D75}" type="datetimeFigureOut">
               <a:rPr lang="zh-CN" altLang="en-US" smtClean="0"/>
-              <a:t>2026/9/15</a:t>
             </a:fld>
             <a:endParaRPr lang="zh-CN" altLang="en-US"/>
           </a:p>
@@ -463,7 +468,6 @@
           <a:p>
             <a:fld id="{565CE74E-AB26-4998-AD42-012C4C1AD076}" type="slidenum">
               <a:rPr lang="zh-CN" altLang="en-US" smtClean="0"/>
-              <a:t>‹#›</a:t>
             </a:fld>
             <a:endParaRPr lang="zh-CN" altLang="en-US"/>
           </a:p>
@@ -518,6 +522,7 @@
               <a:rPr lang="zh-CN" altLang="en-US"/>
               <a:t>单击此处编辑母版标题样式</a:t>
             </a:r>
+            <a:endParaRPr lang="zh-CN" altLang="en-US"/>
           </a:p>
         </p:txBody>
       </p:sp>
@@ -546,6 +551,7 @@
               <a:rPr lang="zh-CN" altLang="en-US"/>
               <a:t>单击此处编辑母版文本样式</a:t>
             </a:r>
+            <a:endParaRPr lang="zh-CN" altLang="en-US"/>
           </a:p>
           <a:p>
             <a:pPr lvl="1"/>
@@ -553,6 +559,7 @@
               <a:rPr lang="zh-CN" altLang="en-US"/>
               <a:t>第二级</a:t>
             </a:r>
+            <a:endParaRPr lang="zh-CN" altLang="en-US"/>
           </a:p>
           <a:p>
             <a:pPr lvl="2"/>
@@ -560,6 +567,7 @@
               <a:rPr lang="zh-CN" altLang="en-US"/>
               <a:t>第三级</a:t>
             </a:r>
+            <a:endParaRPr lang="zh-CN" altLang="en-US"/>
           </a:p>
           <a:p>
             <a:pPr lvl="3"/>
@@ -567,6 +575,7 @@
               <a:rPr lang="zh-CN" altLang="en-US"/>
               <a:t>第四级</a:t>
             </a:r>
+            <a:endParaRPr lang="zh-CN" altLang="en-US"/>
           </a:p>
           <a:p>
             <a:pPr lvl="4"/>
@@ -574,6 +583,7 @@
               <a:rPr lang="zh-CN" altLang="en-US"/>
               <a:t>第五级</a:t>
             </a:r>
+            <a:endParaRPr lang="zh-CN" altLang="en-US"/>
           </a:p>
         </p:txBody>
       </p:sp>
@@ -594,7 +604,6 @@
           <a:p>
             <a:fld id="{D997B5FA-0921-464F-AAE1-844C04324D75}" type="datetimeFigureOut">
               <a:rPr lang="zh-CN" altLang="en-US" smtClean="0"/>
-              <a:t>2026/9/15</a:t>
             </a:fld>
             <a:endParaRPr lang="zh-CN" altLang="en-US"/>
           </a:p>
@@ -636,7 +645,6 @@
           <a:p>
             <a:fld id="{565CE74E-AB26-4998-AD42-012C4C1AD076}" type="slidenum">
               <a:rPr lang="zh-CN" altLang="en-US" smtClean="0"/>
-              <a:t>‹#›</a:t>
             </a:fld>
             <a:endParaRPr lang="zh-CN" altLang="en-US"/>
           </a:p>
@@ -686,6 +694,7 @@
               <a:rPr lang="zh-CN" altLang="en-US"/>
               <a:t>单击此处编辑母版标题样式</a:t>
             </a:r>
+            <a:endParaRPr lang="zh-CN" altLang="en-US"/>
           </a:p>
         </p:txBody>
       </p:sp>
@@ -709,6 +718,7 @@
               <a:rPr lang="zh-CN" altLang="en-US"/>
               <a:t>单击此处编辑母版文本样式</a:t>
             </a:r>
+            <a:endParaRPr lang="zh-CN" altLang="en-US"/>
           </a:p>
           <a:p>
             <a:pPr lvl="1"/>
@@ -716,6 +726,7 @@
               <a:rPr lang="zh-CN" altLang="en-US"/>
               <a:t>第二级</a:t>
             </a:r>
+            <a:endParaRPr lang="zh-CN" altLang="en-US"/>
           </a:p>
           <a:p>
             <a:pPr lvl="2"/>
@@ -723,6 +734,7 @@
               <a:rPr lang="zh-CN" altLang="en-US"/>
               <a:t>第三级</a:t>
             </a:r>
+            <a:endParaRPr lang="zh-CN" altLang="en-US"/>
           </a:p>
           <a:p>
             <a:pPr lvl="3"/>
@@ -730,6 +742,7 @@
               <a:rPr lang="zh-CN" altLang="en-US"/>
               <a:t>第四级</a:t>
             </a:r>
+            <a:endParaRPr lang="zh-CN" altLang="en-US"/>
           </a:p>
           <a:p>
             <a:pPr lvl="4"/>
@@ -737,6 +750,7 @@
               <a:rPr lang="zh-CN" altLang="en-US"/>
               <a:t>第五级</a:t>
             </a:r>
+            <a:endParaRPr lang="zh-CN" altLang="en-US"/>
           </a:p>
         </p:txBody>
       </p:sp>
@@ -757,7 +771,6 @@
           <a:p>
             <a:fld id="{D997B5FA-0921-464F-AAE1-844C04324D75}" type="datetimeFigureOut">
               <a:rPr lang="zh-CN" altLang="en-US" smtClean="0"/>
-              <a:t>2026/9/15</a:t>
             </a:fld>
             <a:endParaRPr lang="zh-CN" altLang="en-US"/>
           </a:p>
@@ -799,7 +812,6 @@
           <a:p>
             <a:fld id="{565CE74E-AB26-4998-AD42-012C4C1AD076}" type="slidenum">
               <a:rPr lang="zh-CN" altLang="en-US" smtClean="0"/>
-              <a:t>‹#›</a:t>
             </a:fld>
             <a:endParaRPr lang="zh-CN" altLang="en-US"/>
           </a:p>
@@ -858,6 +870,7 @@
               <a:rPr lang="zh-CN" altLang="en-US"/>
               <a:t>单击此处编辑母版标题样式</a:t>
             </a:r>
+            <a:endParaRPr lang="zh-CN" altLang="en-US"/>
           </a:p>
         </p:txBody>
       </p:sp>
@@ -977,6 +990,7 @@
               <a:rPr lang="zh-CN" altLang="en-US"/>
               <a:t>单击此处编辑母版文本样式</a:t>
             </a:r>
+            <a:endParaRPr lang="zh-CN" altLang="en-US"/>
           </a:p>
         </p:txBody>
       </p:sp>
@@ -997,7 +1011,6 @@
           <a:p>
             <a:fld id="{D997B5FA-0921-464F-AAE1-844C04324D75}" type="datetimeFigureOut">
               <a:rPr lang="zh-CN" altLang="en-US" smtClean="0"/>
-              <a:t>2026/9/15</a:t>
             </a:fld>
             <a:endParaRPr lang="zh-CN" altLang="en-US"/>
           </a:p>
@@ -1039,7 +1052,6 @@
           <a:p>
             <a:fld id="{565CE74E-AB26-4998-AD42-012C4C1AD076}" type="slidenum">
               <a:rPr lang="zh-CN" altLang="en-US" smtClean="0"/>
-              <a:t>‹#›</a:t>
             </a:fld>
             <a:endParaRPr lang="zh-CN" altLang="en-US"/>
           </a:p>
@@ -1089,6 +1101,7 @@
               <a:rPr lang="zh-CN" altLang="en-US"/>
               <a:t>单击此处编辑母版标题样式</a:t>
             </a:r>
+            <a:endParaRPr lang="zh-CN" altLang="en-US"/>
           </a:p>
         </p:txBody>
       </p:sp>
@@ -1117,6 +1130,7 @@
               <a:rPr lang="zh-CN" altLang="en-US"/>
               <a:t>单击此处编辑母版文本样式</a:t>
             </a:r>
+            <a:endParaRPr lang="zh-CN" altLang="en-US"/>
           </a:p>
           <a:p>
             <a:pPr lvl="1"/>
@@ -1124,6 +1138,7 @@
               <a:rPr lang="zh-CN" altLang="en-US"/>
               <a:t>第二级</a:t>
             </a:r>
+            <a:endParaRPr lang="zh-CN" altLang="en-US"/>
           </a:p>
           <a:p>
             <a:pPr lvl="2"/>
@@ -1131,6 +1146,7 @@
               <a:rPr lang="zh-CN" altLang="en-US"/>
               <a:t>第三级</a:t>
             </a:r>
+            <a:endParaRPr lang="zh-CN" altLang="en-US"/>
           </a:p>
           <a:p>
             <a:pPr lvl="3"/>
@@ -1138,6 +1154,7 @@
               <a:rPr lang="zh-CN" altLang="en-US"/>
               <a:t>第四级</a:t>
             </a:r>
+            <a:endParaRPr lang="zh-CN" altLang="en-US"/>
           </a:p>
           <a:p>
             <a:pPr lvl="4"/>
@@ -1145,6 +1162,7 @@
               <a:rPr lang="zh-CN" altLang="en-US"/>
               <a:t>第五级</a:t>
             </a:r>
+            <a:endParaRPr lang="zh-CN" altLang="en-US"/>
           </a:p>
         </p:txBody>
       </p:sp>
@@ -1173,6 +1191,7 @@
               <a:rPr lang="zh-CN" altLang="en-US"/>
               <a:t>单击此处编辑母版文本样式</a:t>
             </a:r>
+            <a:endParaRPr lang="zh-CN" altLang="en-US"/>
           </a:p>
           <a:p>
             <a:pPr lvl="1"/>
@@ -1180,6 +1199,7 @@
               <a:rPr lang="zh-CN" altLang="en-US"/>
               <a:t>第二级</a:t>
             </a:r>
+            <a:endParaRPr lang="zh-CN" altLang="en-US"/>
           </a:p>
           <a:p>
             <a:pPr lvl="2"/>
@@ -1187,6 +1207,7 @@
               <a:rPr lang="zh-CN" altLang="en-US"/>
               <a:t>第三级</a:t>
             </a:r>
+            <a:endParaRPr lang="zh-CN" altLang="en-US"/>
           </a:p>
           <a:p>
             <a:pPr lvl="3"/>
@@ -1194,6 +1215,7 @@
               <a:rPr lang="zh-CN" altLang="en-US"/>
               <a:t>第四级</a:t>
             </a:r>
+            <a:endParaRPr lang="zh-CN" altLang="en-US"/>
           </a:p>
           <a:p>
             <a:pPr lvl="4"/>
@@ -1201,6 +1223,7 @@
               <a:rPr lang="zh-CN" altLang="en-US"/>
               <a:t>第五级</a:t>
             </a:r>
+            <a:endParaRPr lang="zh-CN" altLang="en-US"/>
           </a:p>
         </p:txBody>
       </p:sp>
@@ -1221,7 +1244,6 @@
           <a:p>
             <a:fld id="{D997B5FA-0921-464F-AAE1-844C04324D75}" type="datetimeFigureOut">
               <a:rPr lang="zh-CN" altLang="en-US" smtClean="0"/>
-              <a:t>2026/9/15</a:t>
             </a:fld>
             <a:endParaRPr lang="zh-CN" altLang="en-US"/>
           </a:p>
@@ -1263,7 +1285,6 @@
           <a:p>
             <a:fld id="{565CE74E-AB26-4998-AD42-012C4C1AD076}" type="slidenum">
               <a:rPr lang="zh-CN" altLang="en-US" smtClean="0"/>
-              <a:t>‹#›</a:t>
             </a:fld>
             <a:endParaRPr lang="zh-CN" altLang="en-US"/>
           </a:p>
@@ -1318,6 +1339,7 @@
               <a:rPr lang="zh-CN" altLang="en-US"/>
               <a:t>单击此处编辑母版标题样式</a:t>
             </a:r>
+            <a:endParaRPr lang="zh-CN" altLang="en-US"/>
           </a:p>
         </p:txBody>
       </p:sp>
@@ -1383,6 +1405,7 @@
               <a:rPr lang="zh-CN" altLang="en-US"/>
               <a:t>单击此处编辑母版文本样式</a:t>
             </a:r>
+            <a:endParaRPr lang="zh-CN" altLang="en-US"/>
           </a:p>
         </p:txBody>
       </p:sp>
@@ -1411,6 +1434,7 @@
               <a:rPr lang="zh-CN" altLang="en-US"/>
               <a:t>单击此处编辑母版文本样式</a:t>
             </a:r>
+            <a:endParaRPr lang="zh-CN" altLang="en-US"/>
           </a:p>
           <a:p>
             <a:pPr lvl="1"/>
@@ -1418,6 +1442,7 @@
               <a:rPr lang="zh-CN" altLang="en-US"/>
               <a:t>第二级</a:t>
             </a:r>
+            <a:endParaRPr lang="zh-CN" altLang="en-US"/>
           </a:p>
           <a:p>
             <a:pPr lvl="2"/>
@@ -1425,6 +1450,7 @@
               <a:rPr lang="zh-CN" altLang="en-US"/>
               <a:t>第三级</a:t>
             </a:r>
+            <a:endParaRPr lang="zh-CN" altLang="en-US"/>
           </a:p>
           <a:p>
             <a:pPr lvl="3"/>
@@ -1432,6 +1458,7 @@
               <a:rPr lang="zh-CN" altLang="en-US"/>
               <a:t>第四级</a:t>
             </a:r>
+            <a:endParaRPr lang="zh-CN" altLang="en-US"/>
           </a:p>
           <a:p>
             <a:pPr lvl="4"/>
@@ -1439,6 +1466,7 @@
               <a:rPr lang="zh-CN" altLang="en-US"/>
               <a:t>第五级</a:t>
             </a:r>
+            <a:endParaRPr lang="zh-CN" altLang="en-US"/>
           </a:p>
         </p:txBody>
       </p:sp>
@@ -1504,6 +1532,7 @@
               <a:rPr lang="zh-CN" altLang="en-US"/>
               <a:t>单击此处编辑母版文本样式</a:t>
             </a:r>
+            <a:endParaRPr lang="zh-CN" altLang="en-US"/>
           </a:p>
         </p:txBody>
       </p:sp>
@@ -1532,6 +1561,7 @@
               <a:rPr lang="zh-CN" altLang="en-US"/>
               <a:t>单击此处编辑母版文本样式</a:t>
             </a:r>
+            <a:endParaRPr lang="zh-CN" altLang="en-US"/>
           </a:p>
           <a:p>
             <a:pPr lvl="1"/>
@@ -1539,6 +1569,7 @@
               <a:rPr lang="zh-CN" altLang="en-US"/>
               <a:t>第二级</a:t>
             </a:r>
+            <a:endParaRPr lang="zh-CN" altLang="en-US"/>
           </a:p>
           <a:p>
             <a:pPr lvl="2"/>
@@ -1546,6 +1577,7 @@
               <a:rPr lang="zh-CN" altLang="en-US"/>
               <a:t>第三级</a:t>
             </a:r>
+            <a:endParaRPr lang="zh-CN" altLang="en-US"/>
           </a:p>
           <a:p>
             <a:pPr lvl="3"/>
@@ -1553,6 +1585,7 @@
               <a:rPr lang="zh-CN" altLang="en-US"/>
               <a:t>第四级</a:t>
             </a:r>
+            <a:endParaRPr lang="zh-CN" altLang="en-US"/>
           </a:p>
           <a:p>
             <a:pPr lvl="4"/>
@@ -1560,6 +1593,7 @@
               <a:rPr lang="zh-CN" altLang="en-US"/>
               <a:t>第五级</a:t>
             </a:r>
+            <a:endParaRPr lang="zh-CN" altLang="en-US"/>
           </a:p>
         </p:txBody>
       </p:sp>
@@ -1580,7 +1614,6 @@
           <a:p>
             <a:fld id="{D997B5FA-0921-464F-AAE1-844C04324D75}" type="datetimeFigureOut">
               <a:rPr lang="zh-CN" altLang="en-US" smtClean="0"/>
-              <a:t>2026/9/15</a:t>
             </a:fld>
             <a:endParaRPr lang="zh-CN" altLang="en-US"/>
           </a:p>
@@ -1622,7 +1655,6 @@
           <a:p>
             <a:fld id="{565CE74E-AB26-4998-AD42-012C4C1AD076}" type="slidenum">
               <a:rPr lang="zh-CN" altLang="en-US" smtClean="0"/>
-              <a:t>‹#›</a:t>
             </a:fld>
             <a:endParaRPr lang="zh-CN" altLang="en-US"/>
           </a:p>
@@ -1672,6 +1704,7 @@
               <a:rPr lang="zh-CN" altLang="en-US"/>
               <a:t>单击此处编辑母版标题样式</a:t>
             </a:r>
+            <a:endParaRPr lang="zh-CN" altLang="en-US"/>
           </a:p>
         </p:txBody>
       </p:sp>
@@ -1692,7 +1725,6 @@
           <a:p>
             <a:fld id="{D997B5FA-0921-464F-AAE1-844C04324D75}" type="datetimeFigureOut">
               <a:rPr lang="zh-CN" altLang="en-US" smtClean="0"/>
-              <a:t>2026/9/15</a:t>
             </a:fld>
             <a:endParaRPr lang="zh-CN" altLang="en-US"/>
           </a:p>
@@ -1734,7 +1766,6 @@
           <a:p>
             <a:fld id="{565CE74E-AB26-4998-AD42-012C4C1AD076}" type="slidenum">
               <a:rPr lang="zh-CN" altLang="en-US" smtClean="0"/>
-              <a:t>‹#›</a:t>
             </a:fld>
             <a:endParaRPr lang="zh-CN" altLang="en-US"/>
           </a:p>
@@ -1782,7 +1813,6 @@
           <a:p>
             <a:fld id="{D997B5FA-0921-464F-AAE1-844C04324D75}" type="datetimeFigureOut">
               <a:rPr lang="zh-CN" altLang="en-US" smtClean="0"/>
-              <a:t>2026/9/15</a:t>
             </a:fld>
             <a:endParaRPr lang="zh-CN" altLang="en-US"/>
           </a:p>
@@ -1824,7 +1854,6 @@
           <a:p>
             <a:fld id="{565CE74E-AB26-4998-AD42-012C4C1AD076}" type="slidenum">
               <a:rPr lang="zh-CN" altLang="en-US" smtClean="0"/>
-              <a:t>‹#›</a:t>
             </a:fld>
             <a:endParaRPr lang="zh-CN" altLang="en-US"/>
           </a:p>
@@ -1883,6 +1912,7 @@
               <a:rPr lang="zh-CN" altLang="en-US"/>
               <a:t>单击此处编辑母版标题样式</a:t>
             </a:r>
+            <a:endParaRPr lang="zh-CN" altLang="en-US"/>
           </a:p>
         </p:txBody>
       </p:sp>
@@ -1939,6 +1969,7 @@
               <a:rPr lang="zh-CN" altLang="en-US"/>
               <a:t>单击此处编辑母版文本样式</a:t>
             </a:r>
+            <a:endParaRPr lang="zh-CN" altLang="en-US"/>
           </a:p>
           <a:p>
             <a:pPr lvl="1"/>
@@ -1946,6 +1977,7 @@
               <a:rPr lang="zh-CN" altLang="en-US"/>
               <a:t>第二级</a:t>
             </a:r>
+            <a:endParaRPr lang="zh-CN" altLang="en-US"/>
           </a:p>
           <a:p>
             <a:pPr lvl="2"/>
@@ -1953,6 +1985,7 @@
               <a:rPr lang="zh-CN" altLang="en-US"/>
               <a:t>第三级</a:t>
             </a:r>
+            <a:endParaRPr lang="zh-CN" altLang="en-US"/>
           </a:p>
           <a:p>
             <a:pPr lvl="3"/>
@@ -1960,6 +1993,7 @@
               <a:rPr lang="zh-CN" altLang="en-US"/>
               <a:t>第四级</a:t>
             </a:r>
+            <a:endParaRPr lang="zh-CN" altLang="en-US"/>
           </a:p>
           <a:p>
             <a:pPr lvl="4"/>
@@ -1967,6 +2001,7 @@
               <a:rPr lang="zh-CN" altLang="en-US"/>
               <a:t>第五级</a:t>
             </a:r>
+            <a:endParaRPr lang="zh-CN" altLang="en-US"/>
           </a:p>
         </p:txBody>
       </p:sp>
@@ -2032,6 +2067,7 @@
               <a:rPr lang="zh-CN" altLang="en-US"/>
               <a:t>单击此处编辑母版文本样式</a:t>
             </a:r>
+            <a:endParaRPr lang="zh-CN" altLang="en-US"/>
           </a:p>
         </p:txBody>
       </p:sp>
@@ -2052,7 +2088,6 @@
           <a:p>
             <a:fld id="{D997B5FA-0921-464F-AAE1-844C04324D75}" type="datetimeFigureOut">
               <a:rPr lang="zh-CN" altLang="en-US" smtClean="0"/>
-              <a:t>2026/9/15</a:t>
             </a:fld>
             <a:endParaRPr lang="zh-CN" altLang="en-US"/>
           </a:p>
@@ -2094,7 +2129,6 @@
           <a:p>
             <a:fld id="{565CE74E-AB26-4998-AD42-012C4C1AD076}" type="slidenum">
               <a:rPr lang="zh-CN" altLang="en-US" smtClean="0"/>
-              <a:t>‹#›</a:t>
             </a:fld>
             <a:endParaRPr lang="zh-CN" altLang="en-US"/>
           </a:p>
@@ -2153,6 +2187,7 @@
               <a:rPr lang="zh-CN" altLang="en-US"/>
               <a:t>单击此处编辑母版标题样式</a:t>
             </a:r>
+            <a:endParaRPr lang="zh-CN" altLang="en-US"/>
           </a:p>
         </p:txBody>
       </p:sp>
@@ -2279,6 +2314,7 @@
               <a:rPr lang="zh-CN" altLang="en-US"/>
               <a:t>单击此处编辑母版文本样式</a:t>
             </a:r>
+            <a:endParaRPr lang="zh-CN" altLang="en-US"/>
           </a:p>
         </p:txBody>
       </p:sp>
@@ -2299,7 +2335,6 @@
           <a:p>
             <a:fld id="{D997B5FA-0921-464F-AAE1-844C04324D75}" type="datetimeFigureOut">
               <a:rPr lang="zh-CN" altLang="en-US" smtClean="0"/>
-              <a:t>2026/9/15</a:t>
             </a:fld>
             <a:endParaRPr lang="zh-CN" altLang="en-US"/>
           </a:p>
@@ -2341,7 +2376,6 @@
           <a:p>
             <a:fld id="{565CE74E-AB26-4998-AD42-012C4C1AD076}" type="slidenum">
               <a:rPr lang="zh-CN" altLang="en-US" smtClean="0"/>
-              <a:t>‹#›</a:t>
             </a:fld>
             <a:endParaRPr lang="zh-CN" altLang="en-US"/>
           </a:p>
@@ -2406,6 +2440,7 @@
               <a:rPr lang="zh-CN" altLang="en-US"/>
               <a:t>单击此处编辑母版标题样式</a:t>
             </a:r>
+            <a:endParaRPr lang="zh-CN" altLang="en-US"/>
           </a:p>
         </p:txBody>
       </p:sp>
@@ -2439,6 +2474,7 @@
               <a:rPr lang="zh-CN" altLang="en-US"/>
               <a:t>单击此处编辑母版文本样式</a:t>
             </a:r>
+            <a:endParaRPr lang="zh-CN" altLang="en-US"/>
           </a:p>
           <a:p>
             <a:pPr lvl="1"/>
@@ -2446,6 +2482,7 @@
               <a:rPr lang="zh-CN" altLang="en-US"/>
               <a:t>第二级</a:t>
             </a:r>
+            <a:endParaRPr lang="zh-CN" altLang="en-US"/>
           </a:p>
           <a:p>
             <a:pPr lvl="2"/>
@@ -2453,6 +2490,7 @@
               <a:rPr lang="zh-CN" altLang="en-US"/>
               <a:t>第三级</a:t>
             </a:r>
+            <a:endParaRPr lang="zh-CN" altLang="en-US"/>
           </a:p>
           <a:p>
             <a:pPr lvl="3"/>
@@ -2460,6 +2498,7 @@
               <a:rPr lang="zh-CN" altLang="en-US"/>
               <a:t>第四级</a:t>
             </a:r>
+            <a:endParaRPr lang="zh-CN" altLang="en-US"/>
           </a:p>
           <a:p>
             <a:pPr lvl="4"/>
@@ -2467,6 +2506,7 @@
               <a:rPr lang="zh-CN" altLang="en-US"/>
               <a:t>第五级</a:t>
             </a:r>
+            <a:endParaRPr lang="zh-CN" altLang="en-US"/>
           </a:p>
         </p:txBody>
       </p:sp>
@@ -2505,7 +2545,6 @@
           <a:p>
             <a:fld id="{D997B5FA-0921-464F-AAE1-844C04324D75}" type="datetimeFigureOut">
               <a:rPr lang="zh-CN" altLang="en-US" smtClean="0"/>
-              <a:t>2026/9/15</a:t>
             </a:fld>
             <a:endParaRPr lang="zh-CN" altLang="en-US"/>
           </a:p>
@@ -2583,7 +2622,6 @@
           <a:p>
             <a:fld id="{565CE74E-AB26-4998-AD42-012C4C1AD076}" type="slidenum">
               <a:rPr lang="zh-CN" altLang="en-US" smtClean="0"/>
-              <a:t>‹#›</a:t>
             </a:fld>
             <a:endParaRPr lang="zh-CN" altLang="en-US"/>
           </a:p>
@@ -2907,13 +2945,7 @@
       </p:grpSpPr>
       <p:sp>
         <p:nvSpPr>
-          <p:cNvPr id="5" name="文本框 4">
-            <a:extLst>
-              <a:ext uri="{FF2B5EF4-FFF2-40B4-BE49-F238E27FC236}">
-                <a16:creationId xmlns:a16="http://schemas.microsoft.com/office/drawing/2014/main" id="{99711EEB-4FF8-7C80-3925-449C7DC99CA0}"/>
-              </a:ext>
-            </a:extLst>
-          </p:cNvPr>
+          <p:cNvPr id="5" name="文本框 4"/>
           <p:cNvSpPr txBox="1"/>
           <p:nvPr/>
         </p:nvSpPr>
@@ -2949,6 +2981,7 @@
               <a:rPr lang="zh-CN" altLang="zh-CN" sz="2000" dirty="0"/>
               <a:t>Markdown 严格分级 </a:t>
             </a:r>
+            <a:endParaRPr lang="zh-CN" altLang="zh-CN" sz="2000" dirty="0"/>
           </a:p>
           <a:p>
             <a:pPr marL="342900" lvl="0" indent="-342900">
@@ -2959,6 +2992,7 @@
               <a:rPr lang="zh-CN" altLang="zh-CN" sz="2000" dirty="0"/>
               <a:t>图片单独打包 + caption </a:t>
             </a:r>
+            <a:endParaRPr lang="zh-CN" altLang="zh-CN" sz="2000" dirty="0"/>
           </a:p>
           <a:p>
             <a:pPr marL="342900" lvl="0" indent="-342900">
@@ -2969,6 +3003,7 @@
               <a:rPr lang="zh-CN" altLang="zh-CN" sz="2000" dirty="0"/>
               <a:t>公式 LaTeX </a:t>
             </a:r>
+            <a:endParaRPr lang="zh-CN" altLang="zh-CN" sz="2000" dirty="0"/>
           </a:p>
           <a:p>
             <a:pPr marL="342900" lvl="0" indent="-342900">
@@ -2979,6 +3014,7 @@
               <a:rPr lang="zh-CN" altLang="zh-CN" sz="2000" dirty="0"/>
               <a:t>reference / Bib </a:t>
             </a:r>
+            <a:endParaRPr lang="zh-CN" altLang="zh-CN" sz="2000" dirty="0"/>
           </a:p>
           <a:p>
             <a:pPr marL="342900" lvl="0" indent="-342900">
@@ -2989,6 +3025,7 @@
               <a:rPr lang="zh-CN" altLang="zh-CN" sz="2000" dirty="0"/>
               <a:t>交互或动画说明 </a:t>
             </a:r>
+            <a:endParaRPr lang="zh-CN" altLang="zh-CN" sz="2000" dirty="0"/>
           </a:p>
           <a:p>
             <a:pPr marL="342900" lvl="0" indent="-342900">
@@ -2999,6 +3036,7 @@
               <a:rPr lang="zh-CN" altLang="zh-CN" sz="2000" dirty="0"/>
               <a:t>每个部分建议采用什么网页组件 </a:t>
             </a:r>
+            <a:endParaRPr lang="zh-CN" altLang="zh-CN" sz="2000" dirty="0"/>
           </a:p>
           <a:p>
             <a:pPr marL="342900" lvl="0" indent="-342900">
@@ -3009,18 +3047,13 @@
               <a:rPr lang="zh-CN" altLang="zh-CN" sz="2000" dirty="0"/>
               <a:t>叙事逻辑和内容呈现形式由建模组自己决定，网页组主要负责实现</a:t>
             </a:r>
-          </a:p>
-        </p:txBody>
-      </p:sp>
-      <p:sp>
-        <p:nvSpPr>
-          <p:cNvPr id="7" name="文本框 6">
-            <a:extLst>
-              <a:ext uri="{FF2B5EF4-FFF2-40B4-BE49-F238E27FC236}">
-                <a16:creationId xmlns:a16="http://schemas.microsoft.com/office/drawing/2014/main" id="{C05DD484-819D-C79E-8956-3C63A2011B73}"/>
-              </a:ext>
-            </a:extLst>
-          </p:cNvPr>
+            <a:endParaRPr lang="zh-CN" altLang="zh-CN" sz="2000" dirty="0"/>
+          </a:p>
+        </p:txBody>
+      </p:sp>
+      <p:sp>
+        <p:nvSpPr>
+          <p:cNvPr id="7" name="文本框 6"/>
           <p:cNvSpPr txBox="1"/>
           <p:nvPr/>
         </p:nvSpPr>
@@ -3096,11 +3129,6 @@
         </p:txBody>
       </p:sp>
     </p:spTree>
-    <p:extLst>
-      <p:ext uri="{BB962C8B-B14F-4D97-AF65-F5344CB8AC3E}">
-        <p14:creationId xmlns:p14="http://schemas.microsoft.com/office/powerpoint/2010/main" val="2173781115"/>
-      </p:ext>
-    </p:extLst>
   </p:cSld>
   <p:clrMapOvr>
     <a:masterClrMapping/>
@@ -3127,13 +3155,7 @@
       </p:grpSpPr>
       <p:sp>
         <p:nvSpPr>
-          <p:cNvPr id="5" name="文本框 4">
-            <a:extLst>
-              <a:ext uri="{FF2B5EF4-FFF2-40B4-BE49-F238E27FC236}">
-                <a16:creationId xmlns:a16="http://schemas.microsoft.com/office/drawing/2014/main" id="{AAEC43C5-B2DA-551C-E39A-759CB2E021AD}"/>
-              </a:ext>
-            </a:extLst>
-          </p:cNvPr>
+          <p:cNvPr id="5" name="文本框 4"/>
           <p:cNvSpPr txBox="1"/>
           <p:nvPr/>
         </p:nvSpPr>
@@ -3164,6 +3186,7 @@
               <a:rPr lang="zh-CN" altLang="zh-CN" sz="2000" dirty="0"/>
               <a:t>振荡器本体现在是否已经可以停止继续扩展？ </a:t>
             </a:r>
+            <a:endParaRPr lang="zh-CN" altLang="zh-CN" sz="2000" dirty="0"/>
           </a:p>
           <a:p>
             <a:pPr marL="342900" lvl="0" indent="-342900">
@@ -3177,6 +3200,7 @@
               <a:rPr lang="zh-CN" altLang="zh-CN" sz="2000" dirty="0"/>
               <a:t>质粒 / 基因组两种情况</a:t>
             </a:r>
+            <a:endParaRPr lang="zh-CN" altLang="zh-CN" sz="2000" dirty="0"/>
           </a:p>
           <a:p>
             <a:pPr marL="342900" lvl="0" indent="-342900">
@@ -3190,6 +3214,7 @@
               <a:rPr lang="zh-CN" altLang="zh-CN" sz="2000" dirty="0"/>
               <a:t>最终输出给 counter 的 waveform ？ </a:t>
             </a:r>
+            <a:endParaRPr lang="zh-CN" altLang="zh-CN" sz="2000" dirty="0"/>
           </a:p>
           <a:p>
             <a:pPr marL="342900" lvl="0" indent="-342900">
@@ -3203,6 +3228,7 @@
               <a:rPr lang="zh-CN" altLang="zh-CN" sz="2000" dirty="0"/>
               <a:t>period / amplitude / pulse width 对下游计数的影响做到什么程度？ </a:t>
             </a:r>
+            <a:endParaRPr lang="zh-CN" altLang="zh-CN" sz="2000" dirty="0"/>
           </a:p>
           <a:p>
             <a:pPr marL="342900" lvl="0" indent="-342900">
@@ -3216,6 +3242,7 @@
               <a:rPr lang="zh-CN" altLang="zh-CN" sz="2000" dirty="0"/>
               <a:t>GSA 找到的关键参数真正转化成“如何调周期”的设计结论</a:t>
             </a:r>
+            <a:endParaRPr lang="zh-CN" altLang="zh-CN" sz="2000" dirty="0"/>
           </a:p>
           <a:p>
             <a:pPr marL="342900" lvl="0" indent="-342900">
@@ -3229,15 +3256,11 @@
               <a:rPr lang="zh-CN" altLang="zh-CN" sz="2000" dirty="0"/>
               <a:t>load effect</a:t>
             </a:r>
+            <a:endParaRPr lang="zh-CN" altLang="zh-CN" sz="2000" dirty="0"/>
           </a:p>
         </p:txBody>
       </p:sp>
     </p:spTree>
-    <p:extLst>
-      <p:ext uri="{BB962C8B-B14F-4D97-AF65-F5344CB8AC3E}">
-        <p14:creationId xmlns:p14="http://schemas.microsoft.com/office/powerpoint/2010/main" val="1229428758"/>
-      </p:ext>
-    </p:extLst>
   </p:cSld>
   <p:clrMapOvr>
     <a:masterClrMapping/>
@@ -3250,13 +3273,7 @@
   <p:cSld>
     <p:spTree>
       <p:nvGrpSpPr>
-        <p:cNvPr id="1" name="">
-          <a:extLst>
-            <a:ext uri="{FF2B5EF4-FFF2-40B4-BE49-F238E27FC236}">
-              <a16:creationId xmlns:a16="http://schemas.microsoft.com/office/drawing/2014/main" id="{A082CBFD-D6C2-8B30-4D74-06DCEAF7E062}"/>
-            </a:ext>
-          </a:extLst>
-        </p:cNvPr>
+        <p:cNvPr id="1" name=""/>
         <p:cNvGrpSpPr/>
         <p:nvPr/>
       </p:nvGrpSpPr>
@@ -3270,13 +3287,7 @@
       </p:grpSpPr>
       <p:sp>
         <p:nvSpPr>
-          <p:cNvPr id="5" name="文本框 4">
-            <a:extLst>
-              <a:ext uri="{FF2B5EF4-FFF2-40B4-BE49-F238E27FC236}">
-                <a16:creationId xmlns:a16="http://schemas.microsoft.com/office/drawing/2014/main" id="{EAA5F65D-DB58-9BCF-AC49-91CC08171C58}"/>
-              </a:ext>
-            </a:extLst>
-          </p:cNvPr>
+          <p:cNvPr id="5" name="文本框 4"/>
           <p:cNvSpPr txBox="1"/>
           <p:nvPr/>
         </p:nvSpPr>
@@ -3363,15 +3374,11 @@
               <a:rPr lang="zh-CN" altLang="zh-CN" sz="2000" dirty="0"/>
               <a:t>one-pulse-one-flip 的工作窗口最后怎么定义？</a:t>
             </a:r>
+            <a:endParaRPr lang="zh-CN" altLang="zh-CN" sz="2000" dirty="0"/>
           </a:p>
         </p:txBody>
       </p:sp>
     </p:spTree>
-    <p:extLst>
-      <p:ext uri="{BB962C8B-B14F-4D97-AF65-F5344CB8AC3E}">
-        <p14:creationId xmlns:p14="http://schemas.microsoft.com/office/powerpoint/2010/main" val="3598526706"/>
-      </p:ext>
-    </p:extLst>
   </p:cSld>
   <p:clrMapOvr>
     <a:masterClrMapping/>
@@ -3384,13 +3391,7 @@
   <p:cSld>
     <p:spTree>
       <p:nvGrpSpPr>
-        <p:cNvPr id="1" name="">
-          <a:extLst>
-            <a:ext uri="{FF2B5EF4-FFF2-40B4-BE49-F238E27FC236}">
-              <a16:creationId xmlns:a16="http://schemas.microsoft.com/office/drawing/2014/main" id="{DD47CB31-993C-5F21-1B7D-9EDBC1EF1BB2}"/>
-            </a:ext>
-          </a:extLst>
-        </p:cNvPr>
+        <p:cNvPr id="1" name=""/>
         <p:cNvGrpSpPr/>
         <p:nvPr/>
       </p:nvGrpSpPr>
@@ -3404,13 +3405,7 @@
       </p:grpSpPr>
       <p:sp>
         <p:nvSpPr>
-          <p:cNvPr id="3" name="文本框 2">
-            <a:extLst>
-              <a:ext uri="{FF2B5EF4-FFF2-40B4-BE49-F238E27FC236}">
-                <a16:creationId xmlns:a16="http://schemas.microsoft.com/office/drawing/2014/main" id="{C078F5F8-D2C7-1771-09F4-A9FAE069711B}"/>
-              </a:ext>
-            </a:extLst>
-          </p:cNvPr>
+          <p:cNvPr id="3" name="文本框 2"/>
           <p:cNvSpPr txBox="1"/>
           <p:nvPr/>
         </p:nvSpPr>
@@ -3441,6 +3436,7 @@
               <a:rPr lang="zh-CN" altLang="zh-CN" sz="2000" dirty="0"/>
               <a:t>最终采用的 FFL 架构</a:t>
             </a:r>
+            <a:endParaRPr lang="zh-CN" altLang="zh-CN" sz="2000" dirty="0"/>
           </a:p>
           <a:p>
             <a:pPr marL="342900" lvl="0" indent="-342900">
@@ -3454,6 +3450,7 @@
               <a:rPr lang="zh-CN" altLang="zh-CN" sz="2000" dirty="0"/>
               <a:t>二级、三级分别做到什么程度？ </a:t>
             </a:r>
+            <a:endParaRPr lang="zh-CN" altLang="zh-CN" sz="2000" dirty="0"/>
           </a:p>
           <a:p>
             <a:pPr marL="342900" lvl="0" indent="-342900">
@@ -3467,6 +3464,7 @@
               <a:rPr lang="zh-CN" altLang="zh-CN" sz="2000" dirty="0"/>
               <a:t>三级 leakage 问题现在怎么处理？ </a:t>
             </a:r>
+            <a:endParaRPr lang="zh-CN" altLang="zh-CN" sz="2000" dirty="0"/>
           </a:p>
           <a:p>
             <a:pPr marL="342900" lvl="0" indent="-342900">
@@ -3480,6 +3478,7 @@
               <a:rPr lang="zh-CN" altLang="zh-CN" sz="2000" dirty="0"/>
               <a:t>为了解决 leakage 改了哪些参数？ </a:t>
             </a:r>
+            <a:endParaRPr lang="zh-CN" altLang="zh-CN" sz="2000" dirty="0"/>
           </a:p>
           <a:p>
             <a:pPr marL="342900" lvl="0" indent="-342900">
@@ -3493,6 +3492,7 @@
               <a:rPr lang="zh-CN" altLang="zh-CN" sz="2000" dirty="0"/>
               <a:t>改参数以后，原来的 single-bit 功能有没有被破坏？ </a:t>
             </a:r>
+            <a:endParaRPr lang="zh-CN" altLang="zh-CN" sz="2000" dirty="0"/>
           </a:p>
           <a:p>
             <a:pPr marL="342900" lvl="0" indent="-342900">
@@ -3506,18 +3506,13 @@
               <a:rPr lang="zh-CN" altLang="zh-CN" sz="2000" dirty="0"/>
               <a:t>最终是要展示“这个架构可行”，还是“这个架构存在明确限制”？</a:t>
             </a:r>
-          </a:p>
-        </p:txBody>
-      </p:sp>
-      <p:sp>
-        <p:nvSpPr>
-          <p:cNvPr id="6" name="文本框 5">
-            <a:extLst>
-              <a:ext uri="{FF2B5EF4-FFF2-40B4-BE49-F238E27FC236}">
-                <a16:creationId xmlns:a16="http://schemas.microsoft.com/office/drawing/2014/main" id="{596BDF1D-C30F-0E27-75D2-9BB0FF0E86E6}"/>
-              </a:ext>
-            </a:extLst>
-          </p:cNvPr>
+            <a:endParaRPr lang="zh-CN" altLang="zh-CN" sz="2000" dirty="0"/>
+          </a:p>
+        </p:txBody>
+      </p:sp>
+      <p:sp>
+        <p:nvSpPr>
+          <p:cNvPr id="6" name="文本框 5"/>
           <p:cNvSpPr txBox="1"/>
           <p:nvPr/>
         </p:nvSpPr>
@@ -3548,6 +3543,7 @@
               <a:rPr lang="zh-CN" altLang="zh-CN" sz="2000" dirty="0"/>
               <a:t>carry pulse 在当前模型里究竟怎么定义？ </a:t>
             </a:r>
+            <a:endParaRPr lang="zh-CN" altLang="zh-CN" sz="2000" dirty="0"/>
           </a:p>
           <a:p>
             <a:pPr marL="342900" indent="-342900">
@@ -3561,6 +3557,7 @@
               <a:rPr lang="zh-CN" altLang="zh-CN" sz="2000" dirty="0"/>
               <a:t>是否正式把它定义为一种 abstract / prospective carry architecture？ </a:t>
             </a:r>
+            <a:endParaRPr lang="zh-CN" altLang="zh-CN" sz="2000" dirty="0"/>
           </a:p>
           <a:p>
             <a:pPr marL="342900" indent="-342900">
@@ -3574,6 +3571,7 @@
               <a:rPr lang="zh-CN" altLang="zh-CN" sz="2000" dirty="0"/>
               <a:t>二级、三级最终分别能给出什么结果？ </a:t>
             </a:r>
+            <a:endParaRPr lang="zh-CN" altLang="zh-CN" sz="2000" dirty="0"/>
           </a:p>
           <a:p>
             <a:pPr marL="342900" indent="-342900">
@@ -3587,18 +3585,13 @@
               <a:rPr lang="zh-CN" altLang="zh-CN" sz="2000" dirty="0"/>
               <a:t>能不能给出 pulse strength / width / interval 的工作窗口？ </a:t>
             </a:r>
-          </a:p>
-        </p:txBody>
-      </p:sp>
-      <p:sp>
-        <p:nvSpPr>
-          <p:cNvPr id="8" name="文本框 7">
-            <a:extLst>
-              <a:ext uri="{FF2B5EF4-FFF2-40B4-BE49-F238E27FC236}">
-                <a16:creationId xmlns:a16="http://schemas.microsoft.com/office/drawing/2014/main" id="{BCB4AD81-74E3-DC49-B9D7-7979C7B7B26C}"/>
-              </a:ext>
-            </a:extLst>
-          </p:cNvPr>
+            <a:endParaRPr lang="zh-CN" altLang="zh-CN" sz="2000" dirty="0"/>
+          </a:p>
+        </p:txBody>
+      </p:sp>
+      <p:sp>
+        <p:nvSpPr>
+          <p:cNvPr id="8" name="文本框 7"/>
           <p:cNvSpPr txBox="1"/>
           <p:nvPr/>
         </p:nvSpPr>
@@ -3638,6 +3631,7 @@
               <a:rPr lang="en-US" altLang="zh-CN" dirty="0"/>
               <a:t>single-bit</a:t>
             </a:r>
+            <a:endParaRPr lang="en-US" altLang="zh-CN" dirty="0"/>
           </a:p>
           <a:p>
             <a:r>
@@ -3649,11 +3643,6 @@
         </p:txBody>
       </p:sp>
     </p:spTree>
-    <p:extLst>
-      <p:ext uri="{BB962C8B-B14F-4D97-AF65-F5344CB8AC3E}">
-        <p14:creationId xmlns:p14="http://schemas.microsoft.com/office/powerpoint/2010/main" val="4081835785"/>
-      </p:ext>
-    </p:extLst>
   </p:cSld>
   <p:clrMapOvr>
     <a:masterClrMapping/>
@@ -3680,13 +3669,7 @@
       </p:grpSpPr>
       <p:sp>
         <p:nvSpPr>
-          <p:cNvPr id="5" name="文本框 4">
-            <a:extLst>
-              <a:ext uri="{FF2B5EF4-FFF2-40B4-BE49-F238E27FC236}">
-                <a16:creationId xmlns:a16="http://schemas.microsoft.com/office/drawing/2014/main" id="{32132AD8-6EC9-A881-19EC-28C4E7710414}"/>
-              </a:ext>
-            </a:extLst>
-          </p:cNvPr>
+          <p:cNvPr id="5" name="文本框 4"/>
           <p:cNvSpPr txBox="1"/>
           <p:nvPr/>
         </p:nvSpPr>
@@ -3744,13 +3727,7 @@
       </p:sp>
       <p:sp>
         <p:nvSpPr>
-          <p:cNvPr id="7" name="文本框 6">
-            <a:extLst>
-              <a:ext uri="{FF2B5EF4-FFF2-40B4-BE49-F238E27FC236}">
-                <a16:creationId xmlns:a16="http://schemas.microsoft.com/office/drawing/2014/main" id="{F7B2D33F-6AFA-EFF2-DF0C-C4C80AE58DE7}"/>
-              </a:ext>
-            </a:extLst>
-          </p:cNvPr>
+          <p:cNvPr id="7" name="文本框 6"/>
           <p:cNvSpPr txBox="1"/>
           <p:nvPr/>
         </p:nvSpPr>
@@ -3780,13 +3757,7 @@
       </p:sp>
       <p:sp>
         <p:nvSpPr>
-          <p:cNvPr id="9" name="文本框 8">
-            <a:extLst>
-              <a:ext uri="{FF2B5EF4-FFF2-40B4-BE49-F238E27FC236}">
-                <a16:creationId xmlns:a16="http://schemas.microsoft.com/office/drawing/2014/main" id="{FBB58115-EEAD-8B97-40B8-4FD1A6E1D190}"/>
-              </a:ext>
-            </a:extLst>
-          </p:cNvPr>
+          <p:cNvPr id="9" name="文本框 8"/>
           <p:cNvSpPr txBox="1"/>
           <p:nvPr/>
         </p:nvSpPr>
@@ -3814,6 +3785,7 @@
               <a:rPr lang="zh-CN" altLang="zh-CN" dirty="0"/>
               <a:t>TEMPO modeling 总体 workflow </a:t>
             </a:r>
+            <a:endParaRPr lang="zh-CN" altLang="zh-CN" dirty="0"/>
           </a:p>
           <a:p>
             <a:pPr marL="342900" lvl="0" indent="-342900">
@@ -3824,6 +3796,7 @@
               <a:rPr lang="zh-CN" altLang="zh-CN" dirty="0"/>
               <a:t>Oscillator → waveform </a:t>
             </a:r>
+            <a:endParaRPr lang="zh-CN" altLang="zh-CN" dirty="0"/>
           </a:p>
           <a:p>
             <a:pPr marL="342900" lvl="0" indent="-342900">
@@ -3834,6 +3807,7 @@
               <a:rPr lang="zh-CN" altLang="zh-CN" dirty="0"/>
               <a:t>Single-bit Int/RDF/BM3R1 机制 </a:t>
             </a:r>
+            <a:endParaRPr lang="zh-CN" altLang="zh-CN" dirty="0"/>
           </a:p>
           <a:p>
             <a:pPr marL="342900" lvl="0" indent="-342900">
@@ -3844,6 +3818,7 @@
               <a:rPr lang="zh-CN" altLang="zh-CN" dirty="0"/>
               <a:t>C 的 FFL carry </a:t>
             </a:r>
+            <a:endParaRPr lang="zh-CN" altLang="zh-CN" dirty="0"/>
           </a:p>
           <a:p>
             <a:pPr marL="342900" lvl="0" indent="-342900">
@@ -3854,6 +3829,7 @@
               <a:rPr lang="zh-CN" altLang="zh-CN" dirty="0"/>
               <a:t>D 的游离 recombinase carry </a:t>
             </a:r>
+            <a:endParaRPr lang="zh-CN" altLang="zh-CN" dirty="0"/>
           </a:p>
           <a:p>
             <a:pPr marL="342900" lvl="0" indent="-342900">
@@ -3864,6 +3840,7 @@
               <a:rPr lang="zh-CN" altLang="zh-CN" dirty="0"/>
               <a:t>Shutdown 机制 </a:t>
             </a:r>
+            <a:endParaRPr lang="zh-CN" altLang="zh-CN" dirty="0"/>
           </a:p>
           <a:p>
             <a:pPr marL="342900" lvl="0" indent="-342900">
@@ -3891,13 +3868,7 @@
       </p:sp>
       <p:sp>
         <p:nvSpPr>
-          <p:cNvPr id="11" name="文本框 10">
-            <a:extLst>
-              <a:ext uri="{FF2B5EF4-FFF2-40B4-BE49-F238E27FC236}">
-                <a16:creationId xmlns:a16="http://schemas.microsoft.com/office/drawing/2014/main" id="{55EFD776-4935-AE89-E261-807110D75785}"/>
-              </a:ext>
-            </a:extLst>
-          </p:cNvPr>
+          <p:cNvPr id="11" name="文本框 10"/>
           <p:cNvSpPr txBox="1"/>
           <p:nvPr/>
         </p:nvSpPr>
@@ -3927,13 +3898,7 @@
       </p:sp>
       <p:sp>
         <p:nvSpPr>
-          <p:cNvPr id="13" name="文本框 12">
-            <a:extLst>
-              <a:ext uri="{FF2B5EF4-FFF2-40B4-BE49-F238E27FC236}">
-                <a16:creationId xmlns:a16="http://schemas.microsoft.com/office/drawing/2014/main" id="{26906192-765A-BCDD-B16B-3915B449951A}"/>
-              </a:ext>
-            </a:extLst>
-          </p:cNvPr>
+          <p:cNvPr id="13" name="文本框 12"/>
           <p:cNvSpPr txBox="1"/>
           <p:nvPr/>
         </p:nvSpPr>
@@ -3984,13 +3949,7 @@
       </p:sp>
       <p:sp>
         <p:nvSpPr>
-          <p:cNvPr id="15" name="文本框 14">
-            <a:extLst>
-              <a:ext uri="{FF2B5EF4-FFF2-40B4-BE49-F238E27FC236}">
-                <a16:creationId xmlns:a16="http://schemas.microsoft.com/office/drawing/2014/main" id="{F5694599-7E57-B4D2-48EB-C19632FE799A}"/>
-              </a:ext>
-            </a:extLst>
-          </p:cNvPr>
+          <p:cNvPr id="15" name="文本框 14"/>
           <p:cNvSpPr txBox="1"/>
           <p:nvPr/>
         </p:nvSpPr>
@@ -4018,6 +3977,7 @@
               <a:rPr lang="zh-CN" altLang="zh-CN" dirty="0"/>
               <a:t>oscillator robustness → 放第 2 章 </a:t>
             </a:r>
+            <a:endParaRPr lang="zh-CN" altLang="zh-CN" dirty="0"/>
           </a:p>
           <a:p>
             <a:pPr marL="342900" lvl="0" indent="-342900">
@@ -4028,6 +3988,7 @@
               <a:rPr lang="zh-CN" altLang="zh-CN" dirty="0"/>
               <a:t>single-bit / coupling robustness → 放第 3 章 </a:t>
             </a:r>
+            <a:endParaRPr lang="zh-CN" altLang="zh-CN" dirty="0"/>
           </a:p>
           <a:p>
             <a:pPr marL="342900" lvl="0" indent="-342900">
@@ -4038,6 +3999,7 @@
               <a:rPr lang="zh-CN" altLang="zh-CN" dirty="0"/>
               <a:t>cascade robustness → 放第 4 章 </a:t>
             </a:r>
+            <a:endParaRPr lang="zh-CN" altLang="zh-CN" dirty="0"/>
           </a:p>
           <a:p>
             <a:pPr marL="342900" lvl="0" indent="-342900">
@@ -4048,18 +4010,13 @@
               <a:rPr lang="zh-CN" altLang="zh-CN" dirty="0"/>
               <a:t>shutdown parameter robustness → 放第 5 章</a:t>
             </a:r>
-          </a:p>
-        </p:txBody>
-      </p:sp>
-      <p:sp>
-        <p:nvSpPr>
-          <p:cNvPr id="17" name="文本框 16">
-            <a:extLst>
-              <a:ext uri="{FF2B5EF4-FFF2-40B4-BE49-F238E27FC236}">
-                <a16:creationId xmlns:a16="http://schemas.microsoft.com/office/drawing/2014/main" id="{33205BF5-0CC0-BBBC-AC97-29BAEA87077C}"/>
-              </a:ext>
-            </a:extLst>
-          </p:cNvPr>
+            <a:endParaRPr lang="zh-CN" altLang="zh-CN" dirty="0"/>
+          </a:p>
+        </p:txBody>
+      </p:sp>
+      <p:sp>
+        <p:nvSpPr>
+          <p:cNvPr id="17" name="文本框 16"/>
           <p:cNvSpPr txBox="1"/>
           <p:nvPr/>
         </p:nvSpPr>
@@ -4089,16 +4046,8 @@
       </p:sp>
       <p:cxnSp>
         <p:nvCxnSpPr>
-          <p:cNvPr id="19" name="直接箭头连接符 18">
-            <a:extLst>
-              <a:ext uri="{FF2B5EF4-FFF2-40B4-BE49-F238E27FC236}">
-                <a16:creationId xmlns:a16="http://schemas.microsoft.com/office/drawing/2014/main" id="{D15178A9-2283-6CCF-B9F0-4204ACA5B477}"/>
-              </a:ext>
-            </a:extLst>
-          </p:cNvPr>
-          <p:cNvCxnSpPr>
-            <a:cxnSpLocks/>
-          </p:cNvCxnSpPr>
+          <p:cNvPr id="19" name="直接箭头连接符 18"/>
+          <p:cNvCxnSpPr/>
           <p:nvPr/>
         </p:nvCxnSpPr>
         <p:spPr>
@@ -4130,13 +4079,7 @@
       </p:cxnSp>
       <p:sp>
         <p:nvSpPr>
-          <p:cNvPr id="22" name="文本框 21">
-            <a:extLst>
-              <a:ext uri="{FF2B5EF4-FFF2-40B4-BE49-F238E27FC236}">
-                <a16:creationId xmlns:a16="http://schemas.microsoft.com/office/drawing/2014/main" id="{571A3F16-4F8C-5ACB-69DF-96B0DF30B502}"/>
-              </a:ext>
-            </a:extLst>
-          </p:cNvPr>
+          <p:cNvPr id="22" name="文本框 21"/>
           <p:cNvSpPr txBox="1"/>
           <p:nvPr/>
         </p:nvSpPr>
@@ -4169,11 +4112,6 @@
         </p:txBody>
       </p:sp>
     </p:spTree>
-    <p:extLst>
-      <p:ext uri="{BB962C8B-B14F-4D97-AF65-F5344CB8AC3E}">
-        <p14:creationId xmlns:p14="http://schemas.microsoft.com/office/powerpoint/2010/main" val="3156167428"/>
-      </p:ext>
-    </p:extLst>
   </p:cSld>
   <p:clrMapOvr>
     <a:masterClrMapping/>
@@ -4200,13 +4138,7 @@
       </p:grpSpPr>
       <p:sp>
         <p:nvSpPr>
-          <p:cNvPr id="5" name="文本框 4">
-            <a:extLst>
-              <a:ext uri="{FF2B5EF4-FFF2-40B4-BE49-F238E27FC236}">
-                <a16:creationId xmlns:a16="http://schemas.microsoft.com/office/drawing/2014/main" id="{B39459BA-B2B1-0BEE-1781-45EA0051FC97}"/>
-              </a:ext>
-            </a:extLst>
-          </p:cNvPr>
+          <p:cNvPr id="5" name="文本框 4"/>
           <p:cNvSpPr txBox="1"/>
           <p:nvPr/>
         </p:nvSpPr>
@@ -4236,13 +4168,7 @@
       </p:sp>
       <p:sp>
         <p:nvSpPr>
-          <p:cNvPr id="7" name="文本框 6">
-            <a:extLst>
-              <a:ext uri="{FF2B5EF4-FFF2-40B4-BE49-F238E27FC236}">
-                <a16:creationId xmlns:a16="http://schemas.microsoft.com/office/drawing/2014/main" id="{4001B944-3E39-57FD-D414-1BC8627726CE}"/>
-              </a:ext>
-            </a:extLst>
-          </p:cNvPr>
+          <p:cNvPr id="7" name="文本框 6"/>
           <p:cNvSpPr txBox="1"/>
           <p:nvPr/>
         </p:nvSpPr>
@@ -4271,11 +4197,6 @@
         </p:txBody>
       </p:sp>
     </p:spTree>
-    <p:extLst>
-      <p:ext uri="{BB962C8B-B14F-4D97-AF65-F5344CB8AC3E}">
-        <p14:creationId xmlns:p14="http://schemas.microsoft.com/office/powerpoint/2010/main" val="2685645403"/>
-      </p:ext>
-    </p:extLst>
   </p:cSld>
   <p:clrMapOvr>
     <a:masterClrMapping/>
@@ -4302,13 +4223,7 @@
       </p:grpSpPr>
       <p:cxnSp>
         <p:nvCxnSpPr>
-          <p:cNvPr id="5" name="直接连接符 4">
-            <a:extLst>
-              <a:ext uri="{FF2B5EF4-FFF2-40B4-BE49-F238E27FC236}">
-                <a16:creationId xmlns:a16="http://schemas.microsoft.com/office/drawing/2014/main" id="{DFE2875D-C0A0-AD54-E1C2-D9C12FAAF69F}"/>
-              </a:ext>
-            </a:extLst>
-          </p:cNvPr>
+          <p:cNvPr id="5" name="直接连接符 4"/>
           <p:cNvCxnSpPr/>
           <p:nvPr/>
         </p:nvCxnSpPr>
@@ -4339,13 +4254,7 @@
       </p:cxnSp>
       <p:sp>
         <p:nvSpPr>
-          <p:cNvPr id="6" name="椭圆 5">
-            <a:extLst>
-              <a:ext uri="{FF2B5EF4-FFF2-40B4-BE49-F238E27FC236}">
-                <a16:creationId xmlns:a16="http://schemas.microsoft.com/office/drawing/2014/main" id="{13F5B9E2-0792-FB4E-0686-3FD9EDDF22B1}"/>
-              </a:ext>
-            </a:extLst>
-          </p:cNvPr>
+          <p:cNvPr id="6" name="椭圆 5"/>
           <p:cNvSpPr/>
           <p:nvPr/>
         </p:nvSpPr>
@@ -4395,13 +4304,7 @@
       </p:sp>
       <p:sp>
         <p:nvSpPr>
-          <p:cNvPr id="8" name="文本框 7">
-            <a:extLst>
-              <a:ext uri="{FF2B5EF4-FFF2-40B4-BE49-F238E27FC236}">
-                <a16:creationId xmlns:a16="http://schemas.microsoft.com/office/drawing/2014/main" id="{2941450B-32DB-550D-3664-8CF75473837B}"/>
-              </a:ext>
-            </a:extLst>
-          </p:cNvPr>
+          <p:cNvPr id="8" name="文本框 7"/>
           <p:cNvSpPr txBox="1"/>
           <p:nvPr/>
         </p:nvSpPr>
@@ -4431,13 +4334,7 @@
       </p:sp>
       <p:sp>
         <p:nvSpPr>
-          <p:cNvPr id="10" name="椭圆 9">
-            <a:extLst>
-              <a:ext uri="{FF2B5EF4-FFF2-40B4-BE49-F238E27FC236}">
-                <a16:creationId xmlns:a16="http://schemas.microsoft.com/office/drawing/2014/main" id="{2B5D784F-C0D7-826A-746E-8AB419339E6D}"/>
-              </a:ext>
-            </a:extLst>
-          </p:cNvPr>
+          <p:cNvPr id="10" name="椭圆 9"/>
           <p:cNvSpPr/>
           <p:nvPr/>
         </p:nvSpPr>
@@ -4487,13 +4384,7 @@
       </p:sp>
       <p:sp>
         <p:nvSpPr>
-          <p:cNvPr id="12" name="文本框 11">
-            <a:extLst>
-              <a:ext uri="{FF2B5EF4-FFF2-40B4-BE49-F238E27FC236}">
-                <a16:creationId xmlns:a16="http://schemas.microsoft.com/office/drawing/2014/main" id="{252FC3D9-D2DA-77A1-EFD6-3651B4E6C34C}"/>
-              </a:ext>
-            </a:extLst>
-          </p:cNvPr>
+          <p:cNvPr id="12" name="文本框 11"/>
           <p:cNvSpPr txBox="1"/>
           <p:nvPr/>
         </p:nvSpPr>
@@ -4523,13 +4414,7 @@
       </p:sp>
       <p:sp>
         <p:nvSpPr>
-          <p:cNvPr id="14" name="椭圆 13">
-            <a:extLst>
-              <a:ext uri="{FF2B5EF4-FFF2-40B4-BE49-F238E27FC236}">
-                <a16:creationId xmlns:a16="http://schemas.microsoft.com/office/drawing/2014/main" id="{61FE4D73-3CC1-A9F0-BD0A-A26F40663650}"/>
-              </a:ext>
-            </a:extLst>
-          </p:cNvPr>
+          <p:cNvPr id="14" name="椭圆 13"/>
           <p:cNvSpPr/>
           <p:nvPr/>
         </p:nvSpPr>
@@ -4579,13 +4464,7 @@
       </p:sp>
       <p:sp>
         <p:nvSpPr>
-          <p:cNvPr id="16" name="文本框 15">
-            <a:extLst>
-              <a:ext uri="{FF2B5EF4-FFF2-40B4-BE49-F238E27FC236}">
-                <a16:creationId xmlns:a16="http://schemas.microsoft.com/office/drawing/2014/main" id="{320B66D5-84CA-FBF6-01A8-7834BD64E122}"/>
-              </a:ext>
-            </a:extLst>
-          </p:cNvPr>
+          <p:cNvPr id="16" name="文本框 15"/>
           <p:cNvSpPr txBox="1"/>
           <p:nvPr/>
         </p:nvSpPr>
@@ -4615,13 +4494,7 @@
       </p:sp>
       <p:sp>
         <p:nvSpPr>
-          <p:cNvPr id="18" name="椭圆 17">
-            <a:extLst>
-              <a:ext uri="{FF2B5EF4-FFF2-40B4-BE49-F238E27FC236}">
-                <a16:creationId xmlns:a16="http://schemas.microsoft.com/office/drawing/2014/main" id="{1D935370-1987-1B7B-1066-B1361F411058}"/>
-              </a:ext>
-            </a:extLst>
-          </p:cNvPr>
+          <p:cNvPr id="18" name="椭圆 17"/>
           <p:cNvSpPr/>
           <p:nvPr/>
         </p:nvSpPr>
@@ -4671,13 +4544,7 @@
       </p:sp>
       <p:sp>
         <p:nvSpPr>
-          <p:cNvPr id="20" name="文本框 19">
-            <a:extLst>
-              <a:ext uri="{FF2B5EF4-FFF2-40B4-BE49-F238E27FC236}">
-                <a16:creationId xmlns:a16="http://schemas.microsoft.com/office/drawing/2014/main" id="{1C2B3C11-F1E2-B798-4543-C013C89E107F}"/>
-              </a:ext>
-            </a:extLst>
-          </p:cNvPr>
+          <p:cNvPr id="20" name="文本框 19"/>
           <p:cNvSpPr txBox="1"/>
           <p:nvPr/>
         </p:nvSpPr>
@@ -4707,13 +4574,7 @@
       </p:sp>
       <p:sp>
         <p:nvSpPr>
-          <p:cNvPr id="22" name="文本框 21">
-            <a:extLst>
-              <a:ext uri="{FF2B5EF4-FFF2-40B4-BE49-F238E27FC236}">
-                <a16:creationId xmlns:a16="http://schemas.microsoft.com/office/drawing/2014/main" id="{EAA06D3F-0EED-9ED7-A5DA-71D69A494AAA}"/>
-              </a:ext>
-            </a:extLst>
-          </p:cNvPr>
+          <p:cNvPr id="22" name="文本框 21"/>
           <p:cNvSpPr txBox="1"/>
           <p:nvPr/>
         </p:nvSpPr>
@@ -4743,13 +4604,7 @@
       </p:sp>
       <p:sp>
         <p:nvSpPr>
-          <p:cNvPr id="26" name="文本框 25">
-            <a:extLst>
-              <a:ext uri="{FF2B5EF4-FFF2-40B4-BE49-F238E27FC236}">
-                <a16:creationId xmlns:a16="http://schemas.microsoft.com/office/drawing/2014/main" id="{30D2BFF2-18A8-5D45-CE15-2965E3FF5F07}"/>
-              </a:ext>
-            </a:extLst>
-          </p:cNvPr>
+          <p:cNvPr id="26" name="文本框 25"/>
           <p:cNvSpPr txBox="1"/>
           <p:nvPr/>
         </p:nvSpPr>
@@ -4779,13 +4634,7 @@
       </p:sp>
       <p:sp>
         <p:nvSpPr>
-          <p:cNvPr id="28" name="文本框 27">
-            <a:extLst>
-              <a:ext uri="{FF2B5EF4-FFF2-40B4-BE49-F238E27FC236}">
-                <a16:creationId xmlns:a16="http://schemas.microsoft.com/office/drawing/2014/main" id="{3943B7F0-A1DE-9275-05C2-EBBE7354E674}"/>
-              </a:ext>
-            </a:extLst>
-          </p:cNvPr>
+          <p:cNvPr id="28" name="文本框 27"/>
           <p:cNvSpPr txBox="1"/>
           <p:nvPr/>
         </p:nvSpPr>
@@ -4815,13 +4664,7 @@
       </p:sp>
       <p:sp>
         <p:nvSpPr>
-          <p:cNvPr id="30" name="文本框 29">
-            <a:extLst>
-              <a:ext uri="{FF2B5EF4-FFF2-40B4-BE49-F238E27FC236}">
-                <a16:creationId xmlns:a16="http://schemas.microsoft.com/office/drawing/2014/main" id="{8B20970C-362A-A0B1-44A5-3F1203102D83}"/>
-              </a:ext>
-            </a:extLst>
-          </p:cNvPr>
+          <p:cNvPr id="30" name="文本框 29"/>
           <p:cNvSpPr txBox="1"/>
           <p:nvPr/>
         </p:nvSpPr>
@@ -4850,11 +4693,6 @@
         </p:txBody>
       </p:sp>
     </p:spTree>
-    <p:extLst>
-      <p:ext uri="{BB962C8B-B14F-4D97-AF65-F5344CB8AC3E}">
-        <p14:creationId xmlns:p14="http://schemas.microsoft.com/office/powerpoint/2010/main" val="4203261418"/>
-      </p:ext>
-    </p:extLst>
   </p:cSld>
   <p:clrMapOvr>
     <a:masterClrMapping/>
@@ -5105,8 +4943,6 @@
       </a:bgFillStyleLst>
     </a:fmtScheme>
   </a:themeElements>
-  <a:objectDefaults/>
-  <a:extraClrSchemeLst/>
   <a:extLst>
     <a:ext uri="{05A4C25C-085E-4340-85A3-A5531E510DB2}">
       <thm15:themeFamily xmlns:thm15="http://schemas.microsoft.com/office/thememl/2012/main" name="Office Theme" id="{62F939B6-93AF-4DB8-9C6B-D6C7DFDC589F}" vid="{4A3C46E8-61CC-4603-A589-7422A47A8E4A}"/>
